--- a/Lunes-08/S01_Lunes-08_2_Post_Resolver-no-deberia-tomar-semanas_4x5.pptx
+++ b/Lunes-08/S01_Lunes-08_2_Post_Resolver-no-deberia-tomar-semanas_4x5.pptx
@@ -3394,7 +3394,7 @@
                 </a:solidFill>
                 <a:latin typeface="Inter"/>
               </a:rPr>
-              <a:t>Activa las notificaciones de @notaly.ve.</a:t>
+              <a:t>Y ya no tiene que ser así. Entra al early access: notaly.com.ve</a:t>
             </a:r>
           </a:p>
         </p:txBody>

--- a/Lunes-08/S01_Lunes-08_2_Post_Resolver-no-deberia-tomar-semanas_4x5.pptx
+++ b/Lunes-08/S01_Lunes-08_2_Post_Resolver-no-deberia-tomar-semanas_4x5.pptx
@@ -3394,7 +3394,7 @@
                 </a:solidFill>
                 <a:latin typeface="Inter"/>
               </a:rPr>
-              <a:t>Y ya no tiene que ser así. Entra al early access: notaly.com.ve</a:t>
+              <a:t>Con Notaly lo haces en línea. notaly.com.ve</a:t>
             </a:r>
           </a:p>
         </p:txBody>

--- a/Lunes-08/S01_Lunes-08_2_Post_Resolver-no-deberia-tomar-semanas_4x5.pptx
+++ b/Lunes-08/S01_Lunes-08_2_Post_Resolver-no-deberia-tomar-semanas_4x5.pptx
@@ -3098,7 +3098,7 @@
       <p:grpSpPr/>
       <p:pic>
         <p:nvPicPr>
-          <p:cNvPr id="2" name="Picture 1" descr="oficina.png"/>
+          <p:cNvPr id="2" name="Picture 1" descr="acta.png"/>
           <p:cNvPicPr>
             <a:picLocks noChangeAspect="1"/>
           </p:cNvPicPr>
@@ -3112,8 +3112,8 @@
         </p:blipFill>
         <p:spPr>
           <a:xfrm>
-            <a:off x="0" y="-342900"/>
-            <a:ext cx="8229600" cy="10972800"/>
+            <a:off x="0" y="-2228850"/>
+            <a:ext cx="8229600" cy="14744700"/>
           </a:xfrm>
           <a:prstGeom prst="rect">
             <a:avLst/>

--- a/Lunes-08/S01_Lunes-08_2_Post_Resolver-no-deberia-tomar-semanas_4x5.pptx
+++ b/Lunes-08/S01_Lunes-08_2_Post_Resolver-no-deberia-tomar-semanas_4x5.pptx
@@ -3098,7 +3098,7 @@
       <p:grpSpPr/>
       <p:pic>
         <p:nvPicPr>
-          <p:cNvPr id="2" name="Picture 1" descr="acta.png"/>
+          <p:cNvPr id="2" name="Picture 1" descr="reloj.png"/>
           <p:cNvPicPr>
             <a:picLocks noChangeAspect="1"/>
           </p:cNvPicPr>
